--- a/3испсп/технологии программирования/4 DLL.pptx
+++ b/3испсп/технологии программирования/4 DLL.pptx
@@ -206,7 +206,7 @@
             <a:fld id="{D64E5A87-3B20-4600-9DCE-BE5A8D5CFD98}" type="datetimeFigureOut">
               <a:rPr lang="ru-RU" smtClean="0"/>
               <a:pPr/>
-              <a:t>05.04.2026</a:t>
+              <a:t>06.04.2026</a:t>
             </a:fld>
             <a:endParaRPr lang="ru-RU"/>
           </a:p>
@@ -1146,7 +1146,7 @@
             <a:fld id="{A302F159-6E30-49ED-809A-AF4C5E7BA22D}" type="datetimeFigureOut">
               <a:rPr lang="ru-RU" smtClean="0"/>
               <a:pPr/>
-              <a:t>05.04.2026</a:t>
+              <a:t>06.04.2026</a:t>
             </a:fld>
             <a:endParaRPr lang="ru-RU"/>
           </a:p>
@@ -1313,7 +1313,7 @@
             <a:fld id="{A302F159-6E30-49ED-809A-AF4C5E7BA22D}" type="datetimeFigureOut">
               <a:rPr lang="ru-RU" smtClean="0"/>
               <a:pPr/>
-              <a:t>05.04.2026</a:t>
+              <a:t>06.04.2026</a:t>
             </a:fld>
             <a:endParaRPr lang="ru-RU"/>
           </a:p>
@@ -1490,7 +1490,7 @@
             <a:fld id="{A302F159-6E30-49ED-809A-AF4C5E7BA22D}" type="datetimeFigureOut">
               <a:rPr lang="ru-RU" smtClean="0"/>
               <a:pPr/>
-              <a:t>05.04.2026</a:t>
+              <a:t>06.04.2026</a:t>
             </a:fld>
             <a:endParaRPr lang="ru-RU"/>
           </a:p>
@@ -1657,7 +1657,7 @@
             <a:fld id="{A302F159-6E30-49ED-809A-AF4C5E7BA22D}" type="datetimeFigureOut">
               <a:rPr lang="ru-RU" smtClean="0"/>
               <a:pPr/>
-              <a:t>05.04.2026</a:t>
+              <a:t>06.04.2026</a:t>
             </a:fld>
             <a:endParaRPr lang="ru-RU"/>
           </a:p>
@@ -1900,7 +1900,7 @@
             <a:fld id="{A302F159-6E30-49ED-809A-AF4C5E7BA22D}" type="datetimeFigureOut">
               <a:rPr lang="ru-RU" smtClean="0"/>
               <a:pPr/>
-              <a:t>05.04.2026</a:t>
+              <a:t>06.04.2026</a:t>
             </a:fld>
             <a:endParaRPr lang="ru-RU"/>
           </a:p>
@@ -2185,7 +2185,7 @@
             <a:fld id="{A302F159-6E30-49ED-809A-AF4C5E7BA22D}" type="datetimeFigureOut">
               <a:rPr lang="ru-RU" smtClean="0"/>
               <a:pPr/>
-              <a:t>05.04.2026</a:t>
+              <a:t>06.04.2026</a:t>
             </a:fld>
             <a:endParaRPr lang="ru-RU"/>
           </a:p>
@@ -2604,7 +2604,7 @@
             <a:fld id="{A302F159-6E30-49ED-809A-AF4C5E7BA22D}" type="datetimeFigureOut">
               <a:rPr lang="ru-RU" smtClean="0"/>
               <a:pPr/>
-              <a:t>05.04.2026</a:t>
+              <a:t>06.04.2026</a:t>
             </a:fld>
             <a:endParaRPr lang="ru-RU"/>
           </a:p>
@@ -2719,7 +2719,7 @@
             <a:fld id="{A302F159-6E30-49ED-809A-AF4C5E7BA22D}" type="datetimeFigureOut">
               <a:rPr lang="ru-RU" smtClean="0"/>
               <a:pPr/>
-              <a:t>05.04.2026</a:t>
+              <a:t>06.04.2026</a:t>
             </a:fld>
             <a:endParaRPr lang="ru-RU"/>
           </a:p>
@@ -2811,7 +2811,7 @@
             <a:fld id="{A302F159-6E30-49ED-809A-AF4C5E7BA22D}" type="datetimeFigureOut">
               <a:rPr lang="ru-RU" smtClean="0"/>
               <a:pPr/>
-              <a:t>05.04.2026</a:t>
+              <a:t>06.04.2026</a:t>
             </a:fld>
             <a:endParaRPr lang="ru-RU"/>
           </a:p>
@@ -3085,7 +3085,7 @@
             <a:fld id="{A302F159-6E30-49ED-809A-AF4C5E7BA22D}" type="datetimeFigureOut">
               <a:rPr lang="ru-RU" smtClean="0"/>
               <a:pPr/>
-              <a:t>05.04.2026</a:t>
+              <a:t>06.04.2026</a:t>
             </a:fld>
             <a:endParaRPr lang="ru-RU"/>
           </a:p>
@@ -3335,7 +3335,7 @@
             <a:fld id="{A302F159-6E30-49ED-809A-AF4C5E7BA22D}" type="datetimeFigureOut">
               <a:rPr lang="ru-RU" smtClean="0"/>
               <a:pPr/>
-              <a:t>05.04.2026</a:t>
+              <a:t>06.04.2026</a:t>
             </a:fld>
             <a:endParaRPr lang="ru-RU"/>
           </a:p>
@@ -3545,7 +3545,7 @@
             <a:fld id="{A302F159-6E30-49ED-809A-AF4C5E7BA22D}" type="datetimeFigureOut">
               <a:rPr lang="ru-RU" smtClean="0"/>
               <a:pPr/>
-              <a:t>05.04.2026</a:t>
+              <a:t>06.04.2026</a:t>
             </a:fld>
             <a:endParaRPr lang="ru-RU"/>
           </a:p>
@@ -6502,39 +6502,6 @@
           </a:p>
         </p:txBody>
       </p:sp>
-      <p:pic>
-        <p:nvPicPr>
-          <p:cNvPr id="2050" name="Picture 2"/>
-          <p:cNvPicPr>
-            <a:picLocks noChangeAspect="1" noChangeArrowheads="1"/>
-          </p:cNvPicPr>
-          <p:nvPr/>
-        </p:nvPicPr>
-        <p:blipFill>
-          <a:blip r:embed="rId2"/>
-          <a:srcRect/>
-          <a:stretch>
-            <a:fillRect/>
-          </a:stretch>
-        </p:blipFill>
-        <p:spPr bwMode="auto">
-          <a:xfrm>
-            <a:off x="3000364" y="4622742"/>
-            <a:ext cx="2928958" cy="2235258"/>
-          </a:xfrm>
-          <a:prstGeom prst="rect">
-            <a:avLst/>
-          </a:prstGeom>
-          <a:noFill/>
-          <a:ln w="9525">
-            <a:noFill/>
-            <a:miter lim="800000"/>
-            <a:headEnd/>
-            <a:tailEnd/>
-          </a:ln>
-          <a:effectLst/>
-        </p:spPr>
-      </p:pic>
     </p:spTree>
   </p:cSld>
   <p:clrMapOvr>
@@ -7106,7 +7073,7 @@
         </p:nvSpPr>
         <p:spPr>
           <a:xfrm>
-            <a:off x="0" y="857232"/>
+            <a:off x="0" y="2105025"/>
             <a:ext cx="9144000" cy="3357586"/>
           </a:xfrm>
           <a:prstGeom prst="rect">
@@ -7156,7 +7123,7 @@
         </p:nvSpPr>
         <p:spPr>
           <a:xfrm>
-            <a:off x="428596" y="0"/>
+            <a:off x="428596" y="-428652"/>
             <a:ext cx="8229600" cy="1143000"/>
           </a:xfrm>
         </p:spPr>
@@ -7184,7 +7151,7 @@
         </p:nvSpPr>
         <p:spPr>
           <a:xfrm>
-            <a:off x="0" y="857232"/>
+            <a:off x="0" y="2105025"/>
             <a:ext cx="9144000" cy="3970318"/>
           </a:xfrm>
           <a:prstGeom prst="rect">
@@ -7453,8 +7420,41 @@
         </p:blipFill>
         <p:spPr bwMode="auto">
           <a:xfrm>
-            <a:off x="1428728" y="4286256"/>
+            <a:off x="1428728" y="5534049"/>
             <a:ext cx="6000750" cy="1323975"/>
+          </a:xfrm>
+          <a:prstGeom prst="rect">
+            <a:avLst/>
+          </a:prstGeom>
+          <a:noFill/>
+          <a:ln w="9525">
+            <a:noFill/>
+            <a:miter lim="800000"/>
+            <a:headEnd/>
+            <a:tailEnd/>
+          </a:ln>
+          <a:effectLst/>
+        </p:spPr>
+      </p:pic>
+      <p:pic>
+        <p:nvPicPr>
+          <p:cNvPr id="7" name="Picture 2"/>
+          <p:cNvPicPr>
+            <a:picLocks noChangeAspect="1" noChangeArrowheads="1"/>
+          </p:cNvPicPr>
+          <p:nvPr/>
+        </p:nvPicPr>
+        <p:blipFill>
+          <a:blip r:embed="rId3"/>
+          <a:srcRect/>
+          <a:stretch>
+            <a:fillRect/>
+          </a:stretch>
+        </p:blipFill>
+        <p:spPr bwMode="auto">
+          <a:xfrm>
+            <a:off x="6215042" y="-142900"/>
+            <a:ext cx="2928958" cy="2235258"/>
           </a:xfrm>
           <a:prstGeom prst="rect">
             <a:avLst/>
